--- a/open-research-tools/r-part-II/r-part-II-slides.pptx
+++ b/open-research-tools/r-part-II/r-part-II-slides.pptx
@@ -21936,12 +21936,32 @@
             </a:r>
             <a:r>
               <a:rPr/>
-              <a:t>. It was subsequently adapted by </a:t>
+              <a:t>. His work was subsequently adapted by </a:t>
             </a:r>
             <a:r>
               <a:rPr>
                 <a:hlinkClick r:id="rId4"/>
               </a:rPr>
+              <a:t>David Rieger</a:t>
+            </a:r>
+            <a:r>
+              <a:rPr/>
+              <a:t>, </a:t>
+            </a:r>
+            <a:r>
+              <a:rPr>
+                <a:hlinkClick r:id="rId5"/>
+              </a:rPr>
+              <a:t>Elizabeth Waterfield</a:t>
+            </a:r>
+            <a:r>
+              <a:rPr/>
+              <a:t>, </a:t>
+            </a:r>
+            <a:r>
+              <a:rPr>
+                <a:hlinkClick r:id="rId6"/>
+              </a:rPr>
               <a:t>Caterina Luz Sanchez Steinhagen</a:t>
             </a:r>
             <a:r>
@@ -21950,26 +21970,6 @@
             </a:r>
             <a:r>
               <a:rPr>
-                <a:hlinkClick r:id="rId5"/>
-              </a:rPr>
-              <a:t>Elizabeth Waterfield</a:t>
-            </a:r>
-            <a:r>
-              <a:rPr/>
-              <a:t>, </a:t>
-            </a:r>
-            <a:r>
-              <a:rPr>
-                <a:hlinkClick r:id="rId6"/>
-              </a:rPr>
-              <a:t>David Rieger</a:t>
-            </a:r>
-            <a:r>
-              <a:rPr/>
-              <a:t>, </a:t>
-            </a:r>
-            <a:r>
-              <a:rPr>
                 <a:hlinkClick r:id="rId7"/>
               </a:rPr>
               <a:t>Sara Lil Middleton</a:t>
@@ -21996,7 +21996,7 @@
             </a:r>
             <a:r>
               <a:rPr/>
-              <a:t> (CC-BY-SA 4.0). Code snippets are dedicated to the public domain and licensed under a </a:t>
+              <a:t> (CC-BY-SA 4.0). Code snippets are dedicated to the public domain and are licensed under a </a:t>
             </a:r>
             <a:r>
               <a:rPr>

--- a/open-research-tools/r-part-II/r-part-II-slides.pptx
+++ b/open-research-tools/r-part-II/r-part-II-slides.pptx
@@ -9702,7 +9702,7 @@
             </a:pPr>
             <a:r>
               <a:rPr/>
-              <a:t>30/09/2026</a:t>
+              <a:t>01/10/2026</a:t>
             </a:r>
           </a:p>
         </p:txBody>

--- a/open-research-tools/r-part-II/r-part-II-slides.pptx
+++ b/open-research-tools/r-part-II/r-part-II-slides.pptx
@@ -9702,7 +9702,7 @@
             </a:pPr>
             <a:r>
               <a:rPr/>
-              <a:t>01/10/2026</a:t>
+              <a:t>05/10/2026</a:t>
             </a:r>
           </a:p>
         </p:txBody>

--- a/open-research-tools/r-part-II/r-part-II-slides.pptx
+++ b/open-research-tools/r-part-II/r-part-II-slides.pptx
@@ -9702,7 +9702,7 @@
             </a:pPr>
             <a:r>
               <a:rPr/>
-              <a:t>05/10/2026</a:t>
+              <a:t>08/10/2026</a:t>
             </a:r>
           </a:p>
         </p:txBody>
@@ -13642,7 +13642,7 @@
             </a:pPr>
             <a:r>
               <a:rPr b="1"/>
-              <a:t>1. What is the primary purpose of the Working Directory in RStudio?</a:t>
+              <a:t>What is the primary purpose of the Working Directory in RStudio?</a:t>
             </a:r>
           </a:p>
           <a:p>
@@ -13699,7 +13699,7 @@
             </a:pPr>
             <a:r>
               <a:rPr b="1"/>
-              <a:t>2. Which function is used to load an already installed package into your current R session?</a:t>
+              <a:t>Which function is used to load an already installed package into your current R session?</a:t>
             </a:r>
           </a:p>
           <a:p>
@@ -13764,7 +13764,7 @@
             </a:pPr>
             <a:r>
               <a:rPr b="1"/>
-              <a:t>3. Which command correctly loads an .rds file named </a:t>
+              <a:t>Which command correctly loads an .rds file named </a:t>
             </a:r>
             <a:r>
               <a:rPr b="1">

--- a/open-research-tools/r-part-II/r-part-II-slides.pptx
+++ b/open-research-tools/r-part-II/r-part-II-slides.pptx
@@ -9702,7 +9702,7 @@
             </a:pPr>
             <a:r>
               <a:rPr/>
-              <a:t>08/10/2026</a:t>
+              <a:t>12/10/2026</a:t>
             </a:r>
           </a:p>
         </p:txBody>

--- a/open-research-tools/r-part-II/r-part-II-slides.pptx
+++ b/open-research-tools/r-part-II/r-part-II-slides.pptx
@@ -9702,7 +9702,7 @@
             </a:pPr>
             <a:r>
               <a:rPr/>
-              <a:t>12/10/2026</a:t>
+              <a:t>13/10/2026</a:t>
             </a:r>
           </a:p>
         </p:txBody>

--- a/open-research-tools/r-part-II/r-part-II-slides.pptx
+++ b/open-research-tools/r-part-II/r-part-II-slides.pptx
@@ -9702,7 +9702,7 @@
             </a:pPr>
             <a:r>
               <a:rPr/>
-              <a:t>13/10/2026</a:t>
+              <a:t>14/10/2026</a:t>
             </a:r>
           </a:p>
         </p:txBody>

--- a/open-research-tools/r-part-II/r-part-II-slides.pptx
+++ b/open-research-tools/r-part-II/r-part-II-slides.pptx
@@ -9702,7 +9702,7 @@
             </a:pPr>
             <a:r>
               <a:rPr/>
-              <a:t>14/10/2026</a:t>
+              <a:t>19/10/2026</a:t>
             </a:r>
           </a:p>
         </p:txBody>

--- a/open-research-tools/r-part-II/r-part-II-slides.pptx
+++ b/open-research-tools/r-part-II/r-part-II-slides.pptx
@@ -9702,7 +9702,7 @@
             </a:pPr>
             <a:r>
               <a:rPr/>
-              <a:t>19/10/2026</a:t>
+              <a:t>22/10/2026</a:t>
             </a:r>
           </a:p>
         </p:txBody>

--- a/open-research-tools/r-part-II/r-part-II-slides.pptx
+++ b/open-research-tools/r-part-II/r-part-II-slides.pptx
@@ -9702,7 +9702,7 @@
             </a:pPr>
             <a:r>
               <a:rPr/>
-              <a:t>22/10/2026</a:t>
+              <a:t>26/10/2026</a:t>
             </a:r>
           </a:p>
         </p:txBody>

--- a/open-research-tools/r-part-II/r-part-II-slides.pptx
+++ b/open-research-tools/r-part-II/r-part-II-slides.pptx
@@ -9702,7 +9702,7 @@
             </a:pPr>
             <a:r>
               <a:rPr/>
-              <a:t>26/10/2026</a:t>
+              <a:t>29/10/2026</a:t>
             </a:r>
           </a:p>
         </p:txBody>
